--- a/m1/diapositivos/aula-10-f20.pptx
+++ b/m1/diapositivos/aula-10-f20.pptx
@@ -6569,7 +6569,7 @@
                 <a:ea typeface="Arial" pitchFamily="34" charset="-122"/>
                 <a:cs typeface="Arial" pitchFamily="34" charset="-120"/>
               </a:rPr>
-              <a:t>Acredita no grito e corre para salvar o Mestre</a:t>
+              <a:t>Acredita no grito e corre a salvar o Mestre</a:t>
             </a:r>
             <a:endParaRPr lang="en-US" sz="2400" dirty="0"/>
           </a:p>
@@ -6677,7 +6677,7 @@
                 <a:ea typeface="Arial" pitchFamily="34" charset="-122"/>
                 <a:cs typeface="Arial" pitchFamily="34" charset="-120"/>
               </a:rPr>
-              <a:t>Corre para fugir do perigo</a:t>
+              <a:t>Corre para fugir do perigo e pôr-se a salvo</a:t>
             </a:r>
             <a:endParaRPr lang="en-US" sz="2400" dirty="0"/>
           </a:p>
@@ -6785,7 +6785,7 @@
                 <a:ea typeface="Arial" pitchFamily="34" charset="-122"/>
                 <a:cs typeface="Arial" pitchFamily="34" charset="-120"/>
               </a:rPr>
-              <a:t>Sabe que o grito era combinado</a:t>
+              <a:t>Sabe desde o início que o grito era combinado</a:t>
             </a:r>
             <a:endParaRPr lang="en-US" sz="2400" dirty="0"/>
           </a:p>
@@ -7036,7 +7036,7 @@
                 <a:ea typeface="Arial" pitchFamily="34" charset="-122"/>
                 <a:cs typeface="Arial" pitchFamily="34" charset="-120"/>
               </a:rPr>
-              <a:t>Acredita no grito e corre para salvar o Mestre</a:t>
+              <a:t>Acredita no grito e corre a salvar o Mestre</a:t>
             </a:r>
             <a:endParaRPr lang="en-US" sz="3400" dirty="0"/>
           </a:p>
@@ -8255,7 +8255,7 @@
                 <a:ea typeface="Arial" pitchFamily="34" charset="-122"/>
                 <a:cs typeface="Arial" pitchFamily="34" charset="-120"/>
               </a:rPr>
-              <a:t>A cidade decide sem o Mestre</a:t>
+              <a:t>A cidade decide sozinha a defesa, sem o Mestre</a:t>
             </a:r>
             <a:endParaRPr lang="en-US" sz="2400" dirty="0"/>
           </a:p>
@@ -8471,7 +8471,7 @@
                 <a:ea typeface="Arial" pitchFamily="34" charset="-122"/>
                 <a:cs typeface="Arial" pitchFamily="34" charset="-120"/>
               </a:rPr>
-              <a:t>O Mestre manda, e a cidade só obedece</a:t>
+              <a:t>O Mestre manda sozinho, e a cidade só obedece</a:t>
             </a:r>
             <a:endParaRPr lang="en-US" sz="2400" dirty="0"/>
           </a:p>
